--- a/tools/printables/feedback-form.pptx
+++ b/tools/printables/feedback-form.pptx
@@ -3131,7 +3131,7 @@
         </p:nvSpPr>
         <p:spPr>
           <a:xfrm>
-            <a:off x="360000" y="576000"/>
+            <a:off x="360000" y="540000"/>
             <a:ext cx="6840000" cy="216000"/>
           </a:xfrm>
           <a:prstGeom prst="rect">
@@ -3153,7 +3153,7 @@
                 </a:solidFill>
                 <a:latin typeface="Aptos"/>
               </a:rPr>
-              <a:t>Anonymous. About three minutes. Thank you. (The grey labels are Kirkpatrick's levels: this form is Day 3 in practice.)</a:t>
+              <a:t>Anonymous: please don't add your name. We type up the answers without anything identifying, keep them to improve the programme, report only group totals and shred the paper. About three minutes. (Grey labels: Kirkpatrick's levels, so this form is Day 3 in practice.)</a:t>
             </a:r>
           </a:p>
         </p:txBody>
@@ -3816,7 +3816,7 @@
         </p:nvSpPr>
         <p:spPr>
           <a:xfrm>
-            <a:off x="360000" y="5832000"/>
+            <a:off x="360000" y="5796000"/>
             <a:ext cx="6840000" cy="216000"/>
           </a:xfrm>
           <a:prstGeom prst="rect">
@@ -3838,7 +3838,7 @@
                 </a:solidFill>
                 <a:latin typeface="Aptos"/>
               </a:rPr>
-              <a:t>Anonymous. About three minutes. Thank you. (The grey labels are Kirkpatrick's levels: this form is Day 3 in practice.)</a:t>
+              <a:t>Anonymous: please don't add your name. We type up the answers without anything identifying, keep them to improve the programme, report only group totals and shred the paper. About three minutes. (Grey labels: Kirkpatrick's levels, so this form is Day 3 in practice.)</a:t>
             </a:r>
           </a:p>
         </p:txBody>
@@ -4418,6 +4418,76 @@
                 <a:latin typeface="Aptos"/>
               </a:rPr>
               <a:t>Teaching That Lands · CC BY 4.0</a:t>
+            </a:r>
+          </a:p>
+        </p:txBody>
+      </p:sp>
+      <p:sp>
+        <p:nvSpPr>
+          <p:cNvPr id="5" name="TextBox 4"/>
+          <p:cNvSpPr txBox="1"/>
+          <p:nvPr/>
+        </p:nvSpPr>
+        <p:spPr>
+          <a:xfrm>
+            <a:off x="3960000" y="4644000"/>
+            <a:ext cx="3240000" cy="252000"/>
+          </a:xfrm>
+          <a:prstGeom prst="rect">
+            <a:avLst/>
+          </a:prstGeom>
+          <a:noFill/>
+        </p:spPr>
+        <p:txBody>
+          <a:bodyPr wrap="square" anchor="t" lIns="54000" rIns="54000" tIns="54000" bIns="54000">
+            <a:spAutoFit/>
+          </a:bodyPr>
+          <a:lstStyle/>
+          <a:p>
+            <a:pPr algn="r"/>
+            <a:r>
+              <a:rPr sz="900" b="0" i="0" u="none">
+                <a:solidFill>
+                  <a:srgbClr val="333333"/>
+                </a:solidFill>
+                <a:latin typeface="Aptos"/>
+              </a:rPr>
+              <a:t>▢  You can quote me (no name or workplace)</a:t>
+            </a:r>
+          </a:p>
+        </p:txBody>
+      </p:sp>
+      <p:sp>
+        <p:nvSpPr>
+          <p:cNvPr id="5" name="TextBox 4"/>
+          <p:cNvSpPr txBox="1"/>
+          <p:nvPr/>
+        </p:nvSpPr>
+        <p:spPr>
+          <a:xfrm>
+            <a:off x="3960000" y="9900000"/>
+            <a:ext cx="3240000" cy="252000"/>
+          </a:xfrm>
+          <a:prstGeom prst="rect">
+            <a:avLst/>
+          </a:prstGeom>
+          <a:noFill/>
+        </p:spPr>
+        <p:txBody>
+          <a:bodyPr wrap="square" anchor="t" lIns="54000" rIns="54000" tIns="54000" bIns="54000">
+            <a:spAutoFit/>
+          </a:bodyPr>
+          <a:lstStyle/>
+          <a:p>
+            <a:pPr algn="r"/>
+            <a:r>
+              <a:rPr sz="900" b="0" i="0" u="none">
+                <a:solidFill>
+                  <a:srgbClr val="333333"/>
+                </a:solidFill>
+                <a:latin typeface="Aptos"/>
+              </a:rPr>
+              <a:t>▢  You can quote me (no name or workplace)</a:t>
             </a:r>
           </a:p>
         </p:txBody>
